--- a/RISCVstage2.pptx
+++ b/RISCVstage2.pptx
@@ -616,7 +616,7 @@
           <a:p>
             <a:fld id="{51AFF834-1BEC-4F95-9622-28B5DCC1FE16}" type="datetimeFigureOut">
               <a:rPr lang="en-US" smtClean="0"/>
-              <a:t>3/10/2026</a:t>
+              <a:t>4/5/2026</a:t>
             </a:fld>
             <a:endParaRPr lang="en-US"/>
           </a:p>
@@ -814,7 +814,7 @@
           <a:p>
             <a:fld id="{51AFF834-1BEC-4F95-9622-28B5DCC1FE16}" type="datetimeFigureOut">
               <a:rPr lang="en-US" smtClean="0"/>
-              <a:t>3/10/2026</a:t>
+              <a:t>4/5/2026</a:t>
             </a:fld>
             <a:endParaRPr lang="en-US"/>
           </a:p>
@@ -1022,7 +1022,7 @@
           <a:p>
             <a:fld id="{51AFF834-1BEC-4F95-9622-28B5DCC1FE16}" type="datetimeFigureOut">
               <a:rPr lang="en-US" smtClean="0"/>
-              <a:t>3/10/2026</a:t>
+              <a:t>4/5/2026</a:t>
             </a:fld>
             <a:endParaRPr lang="en-US"/>
           </a:p>
@@ -1220,7 +1220,7 @@
           <a:p>
             <a:fld id="{51AFF834-1BEC-4F95-9622-28B5DCC1FE16}" type="datetimeFigureOut">
               <a:rPr lang="en-US" smtClean="0"/>
-              <a:t>3/10/2026</a:t>
+              <a:t>4/5/2026</a:t>
             </a:fld>
             <a:endParaRPr lang="en-US"/>
           </a:p>
@@ -1495,7 +1495,7 @@
           <a:p>
             <a:fld id="{51AFF834-1BEC-4F95-9622-28B5DCC1FE16}" type="datetimeFigureOut">
               <a:rPr lang="en-US" smtClean="0"/>
-              <a:t>3/10/2026</a:t>
+              <a:t>4/5/2026</a:t>
             </a:fld>
             <a:endParaRPr lang="en-US"/>
           </a:p>
@@ -1760,7 +1760,7 @@
           <a:p>
             <a:fld id="{51AFF834-1BEC-4F95-9622-28B5DCC1FE16}" type="datetimeFigureOut">
               <a:rPr lang="en-US" smtClean="0"/>
-              <a:t>3/10/2026</a:t>
+              <a:t>4/5/2026</a:t>
             </a:fld>
             <a:endParaRPr lang="en-US"/>
           </a:p>
@@ -2172,7 +2172,7 @@
           <a:p>
             <a:fld id="{51AFF834-1BEC-4F95-9622-28B5DCC1FE16}" type="datetimeFigureOut">
               <a:rPr lang="en-US" smtClean="0"/>
-              <a:t>3/10/2026</a:t>
+              <a:t>4/5/2026</a:t>
             </a:fld>
             <a:endParaRPr lang="en-US"/>
           </a:p>
@@ -2313,7 +2313,7 @@
           <a:p>
             <a:fld id="{51AFF834-1BEC-4F95-9622-28B5DCC1FE16}" type="datetimeFigureOut">
               <a:rPr lang="en-US" smtClean="0"/>
-              <a:t>3/10/2026</a:t>
+              <a:t>4/5/2026</a:t>
             </a:fld>
             <a:endParaRPr lang="en-US"/>
           </a:p>
@@ -2426,7 +2426,7 @@
           <a:p>
             <a:fld id="{51AFF834-1BEC-4F95-9622-28B5DCC1FE16}" type="datetimeFigureOut">
               <a:rPr lang="en-US" smtClean="0"/>
-              <a:t>3/10/2026</a:t>
+              <a:t>4/5/2026</a:t>
             </a:fld>
             <a:endParaRPr lang="en-US"/>
           </a:p>
@@ -2737,7 +2737,7 @@
           <a:p>
             <a:fld id="{51AFF834-1BEC-4F95-9622-28B5DCC1FE16}" type="datetimeFigureOut">
               <a:rPr lang="en-US" smtClean="0"/>
-              <a:t>3/10/2026</a:t>
+              <a:t>4/5/2026</a:t>
             </a:fld>
             <a:endParaRPr lang="en-US"/>
           </a:p>
@@ -3025,7 +3025,7 @@
           <a:p>
             <a:fld id="{51AFF834-1BEC-4F95-9622-28B5DCC1FE16}" type="datetimeFigureOut">
               <a:rPr lang="en-US" smtClean="0"/>
-              <a:t>3/10/2026</a:t>
+              <a:t>4/5/2026</a:t>
             </a:fld>
             <a:endParaRPr lang="en-US"/>
           </a:p>
@@ -3266,7 +3266,7 @@
           <a:p>
             <a:fld id="{51AFF834-1BEC-4F95-9622-28B5DCC1FE16}" type="datetimeFigureOut">
               <a:rPr lang="en-US" smtClean="0"/>
-              <a:t>3/10/2026</a:t>
+              <a:t>4/5/2026</a:t>
             </a:fld>
             <a:endParaRPr lang="en-US"/>
           </a:p>
@@ -9375,16 +9375,21 @@
               </a:ext>
             </a:extLst>
           </p:cNvPr>
-          <p:cNvCxnSpPr/>
+          <p:cNvCxnSpPr>
+            <a:cxnSpLocks/>
+            <a:stCxn id="138" idx="1"/>
+          </p:cNvCxnSpPr>
           <p:nvPr/>
         </p:nvCxnSpPr>
         <p:spPr>
-          <a:xfrm>
-            <a:off x="3209831" y="3381866"/>
-            <a:ext cx="177808" cy="0"/>
-          </a:xfrm>
-          <a:prstGeom prst="straightConnector1">
-            <a:avLst/>
+          <a:xfrm rot="10800000" flipH="1">
+            <a:off x="2948821" y="3394567"/>
+            <a:ext cx="438815" cy="343848"/>
+          </a:xfrm>
+          <a:prstGeom prst="bentConnector3">
+            <a:avLst>
+              <a:gd name="adj1" fmla="val -52095"/>
+            </a:avLst>
           </a:prstGeom>
           <a:ln>
             <a:solidFill>
@@ -10694,6 +10699,1236 @@
           </a:fontRef>
         </p:style>
       </p:cxnSp>
+      <p:cxnSp>
+        <p:nvCxnSpPr>
+          <p:cNvPr id="30" name="Straight Arrow Connector 29">
+            <a:extLst>
+              <a:ext uri="{FF2B5EF4-FFF2-40B4-BE49-F238E27FC236}">
+                <a16:creationId xmlns:a16="http://schemas.microsoft.com/office/drawing/2014/main" id="{D07067A0-744E-82FC-6E97-02A96F45B2D8}"/>
+              </a:ext>
+            </a:extLst>
+          </p:cNvPr>
+          <p:cNvCxnSpPr>
+            <a:cxnSpLocks/>
+          </p:cNvCxnSpPr>
+          <p:nvPr/>
+        </p:nvCxnSpPr>
+        <p:spPr>
+          <a:xfrm>
+            <a:off x="431873" y="2073941"/>
+            <a:ext cx="0" cy="156554"/>
+          </a:xfrm>
+          <a:prstGeom prst="straightConnector1">
+            <a:avLst/>
+          </a:prstGeom>
+          <a:ln>
+            <a:tailEnd type="triangle"/>
+          </a:ln>
+        </p:spPr>
+        <p:style>
+          <a:lnRef idx="2">
+            <a:schemeClr val="accent1"/>
+          </a:lnRef>
+          <a:fillRef idx="0">
+            <a:schemeClr val="accent1"/>
+          </a:fillRef>
+          <a:effectRef idx="1">
+            <a:schemeClr val="accent1"/>
+          </a:effectRef>
+          <a:fontRef idx="minor">
+            <a:schemeClr val="tx1"/>
+          </a:fontRef>
+        </p:style>
+      </p:cxnSp>
+      <p:cxnSp>
+        <p:nvCxnSpPr>
+          <p:cNvPr id="34" name="Straight Arrow Connector 33">
+            <a:extLst>
+              <a:ext uri="{FF2B5EF4-FFF2-40B4-BE49-F238E27FC236}">
+                <a16:creationId xmlns:a16="http://schemas.microsoft.com/office/drawing/2014/main" id="{2AB8D8DD-7B0F-0AFF-812F-02F245A5134A}"/>
+              </a:ext>
+            </a:extLst>
+          </p:cNvPr>
+          <p:cNvCxnSpPr>
+            <a:cxnSpLocks/>
+          </p:cNvCxnSpPr>
+          <p:nvPr/>
+        </p:nvCxnSpPr>
+        <p:spPr>
+          <a:xfrm>
+            <a:off x="555698" y="2073941"/>
+            <a:ext cx="0" cy="156554"/>
+          </a:xfrm>
+          <a:prstGeom prst="straightConnector1">
+            <a:avLst/>
+          </a:prstGeom>
+          <a:ln>
+            <a:tailEnd type="triangle"/>
+          </a:ln>
+        </p:spPr>
+        <p:style>
+          <a:lnRef idx="2">
+            <a:schemeClr val="accent1"/>
+          </a:lnRef>
+          <a:fillRef idx="0">
+            <a:schemeClr val="accent1"/>
+          </a:fillRef>
+          <a:effectRef idx="1">
+            <a:schemeClr val="accent1"/>
+          </a:effectRef>
+          <a:fontRef idx="minor">
+            <a:schemeClr val="tx1"/>
+          </a:fontRef>
+        </p:style>
+      </p:cxnSp>
+      <p:sp>
+        <p:nvSpPr>
+          <p:cNvPr id="35" name="TextBox 34">
+            <a:extLst>
+              <a:ext uri="{FF2B5EF4-FFF2-40B4-BE49-F238E27FC236}">
+                <a16:creationId xmlns:a16="http://schemas.microsoft.com/office/drawing/2014/main" id="{89C83EEF-BB83-4732-5E92-3C83C39896F5}"/>
+              </a:ext>
+            </a:extLst>
+          </p:cNvPr>
+          <p:cNvSpPr txBox="1"/>
+          <p:nvPr/>
+        </p:nvSpPr>
+        <p:spPr>
+          <a:xfrm>
+            <a:off x="164751" y="1875847"/>
+            <a:ext cx="348172" cy="246221"/>
+          </a:xfrm>
+          <a:prstGeom prst="rect">
+            <a:avLst/>
+          </a:prstGeom>
+          <a:noFill/>
+        </p:spPr>
+        <p:txBody>
+          <a:bodyPr wrap="none" rtlCol="0">
+            <a:spAutoFit/>
+          </a:bodyPr>
+          <a:lstStyle/>
+          <a:p>
+            <a:r>
+              <a:rPr lang="en-US" sz="1000" dirty="0" err="1"/>
+              <a:t>clk</a:t>
+            </a:r>
+            <a:endParaRPr lang="en-US" sz="1000" dirty="0"/>
+          </a:p>
+        </p:txBody>
+      </p:sp>
+      <p:sp>
+        <p:nvSpPr>
+          <p:cNvPr id="36" name="TextBox 35">
+            <a:extLst>
+              <a:ext uri="{FF2B5EF4-FFF2-40B4-BE49-F238E27FC236}">
+                <a16:creationId xmlns:a16="http://schemas.microsoft.com/office/drawing/2014/main" id="{4D9B181D-70E6-B894-F432-BED7FD11A807}"/>
+              </a:ext>
+            </a:extLst>
+          </p:cNvPr>
+          <p:cNvSpPr txBox="1"/>
+          <p:nvPr/>
+        </p:nvSpPr>
+        <p:spPr>
+          <a:xfrm>
+            <a:off x="352447" y="1871443"/>
+            <a:ext cx="466794" cy="246221"/>
+          </a:xfrm>
+          <a:prstGeom prst="rect">
+            <a:avLst/>
+          </a:prstGeom>
+          <a:noFill/>
+        </p:spPr>
+        <p:txBody>
+          <a:bodyPr wrap="none" rtlCol="0">
+            <a:spAutoFit/>
+          </a:bodyPr>
+          <a:lstStyle/>
+          <a:p>
+            <a:r>
+              <a:rPr lang="en-US" sz="1000" dirty="0"/>
+              <a:t>reset</a:t>
+            </a:r>
+          </a:p>
+        </p:txBody>
+      </p:sp>
+      <p:sp>
+        <p:nvSpPr>
+          <p:cNvPr id="37" name="TextBox 36">
+            <a:extLst>
+              <a:ext uri="{FF2B5EF4-FFF2-40B4-BE49-F238E27FC236}">
+                <a16:creationId xmlns:a16="http://schemas.microsoft.com/office/drawing/2014/main" id="{FCB1C58B-9DFD-A23B-4DB0-B9105F91DA16}"/>
+              </a:ext>
+            </a:extLst>
+          </p:cNvPr>
+          <p:cNvSpPr txBox="1"/>
+          <p:nvPr/>
+        </p:nvSpPr>
+        <p:spPr>
+          <a:xfrm>
+            <a:off x="2287966" y="5212625"/>
+            <a:ext cx="521297" cy="230832"/>
+          </a:xfrm>
+          <a:prstGeom prst="rect">
+            <a:avLst/>
+          </a:prstGeom>
+          <a:noFill/>
+        </p:spPr>
+        <p:txBody>
+          <a:bodyPr wrap="none" rtlCol="0">
+            <a:spAutoFit/>
+          </a:bodyPr>
+          <a:lstStyle/>
+          <a:p>
+            <a:pPr algn="ctr"/>
+            <a:r>
+              <a:rPr lang="en-US" sz="900" dirty="0" err="1"/>
+              <a:t>alu_op</a:t>
+            </a:r>
+            <a:endParaRPr lang="en-US" sz="900" dirty="0"/>
+          </a:p>
+        </p:txBody>
+      </p:sp>
+      <p:sp>
+        <p:nvSpPr>
+          <p:cNvPr id="118" name="TextBox 117">
+            <a:extLst>
+              <a:ext uri="{FF2B5EF4-FFF2-40B4-BE49-F238E27FC236}">
+                <a16:creationId xmlns:a16="http://schemas.microsoft.com/office/drawing/2014/main" id="{9631CB6C-361E-8B14-4AD5-3DC6C3933653}"/>
+              </a:ext>
+            </a:extLst>
+          </p:cNvPr>
+          <p:cNvSpPr txBox="1"/>
+          <p:nvPr/>
+        </p:nvSpPr>
+        <p:spPr>
+          <a:xfrm>
+            <a:off x="2024908" y="4356655"/>
+            <a:ext cx="2085358" cy="369332"/>
+          </a:xfrm>
+          <a:prstGeom prst="rect">
+            <a:avLst/>
+          </a:prstGeom>
+          <a:noFill/>
+        </p:spPr>
+        <p:txBody>
+          <a:bodyPr wrap="square" rtlCol="0">
+            <a:spAutoFit/>
+          </a:bodyPr>
+          <a:lstStyle/>
+          <a:p>
+            <a:pPr algn="ctr"/>
+            <a:r>
+              <a:rPr lang="en-US" sz="900" dirty="0" err="1"/>
+              <a:t>Reg_write</a:t>
+            </a:r>
+            <a:r>
+              <a:rPr lang="en-US" sz="900" dirty="0"/>
+              <a:t>, </a:t>
+            </a:r>
+            <a:r>
+              <a:rPr lang="en-US" sz="900" dirty="0" err="1"/>
+              <a:t>mem_read</a:t>
+            </a:r>
+            <a:r>
+              <a:rPr lang="en-US" sz="900" dirty="0"/>
+              <a:t>, </a:t>
+            </a:r>
+            <a:r>
+              <a:rPr lang="en-US" sz="900" dirty="0" err="1"/>
+              <a:t>mem_write</a:t>
+            </a:r>
+            <a:r>
+              <a:rPr lang="en-US" sz="900" dirty="0"/>
+              <a:t>, </a:t>
+            </a:r>
+            <a:r>
+              <a:rPr lang="en-US" sz="900" dirty="0" err="1"/>
+              <a:t>alu_src</a:t>
+            </a:r>
+            <a:r>
+              <a:rPr lang="en-US" sz="900" dirty="0"/>
+              <a:t>, branch, </a:t>
+            </a:r>
+            <a:r>
+              <a:rPr lang="en-US" sz="900" dirty="0" err="1"/>
+              <a:t>load_addr</a:t>
+            </a:r>
+            <a:r>
+              <a:rPr lang="en-US" sz="900" dirty="0"/>
+              <a:t>, jump</a:t>
+            </a:r>
+          </a:p>
+        </p:txBody>
+      </p:sp>
+      <p:sp>
+        <p:nvSpPr>
+          <p:cNvPr id="119" name="Rectangle 118">
+            <a:extLst>
+              <a:ext uri="{FF2B5EF4-FFF2-40B4-BE49-F238E27FC236}">
+                <a16:creationId xmlns:a16="http://schemas.microsoft.com/office/drawing/2014/main" id="{2BF58EC6-CAF3-652A-CBEF-7E03C78865B0}"/>
+              </a:ext>
+            </a:extLst>
+          </p:cNvPr>
+          <p:cNvSpPr/>
+          <p:nvPr/>
+        </p:nvSpPr>
+        <p:spPr>
+          <a:xfrm>
+            <a:off x="4156680" y="4532442"/>
+            <a:ext cx="865785" cy="1243414"/>
+          </a:xfrm>
+          <a:prstGeom prst="rect">
+            <a:avLst/>
+          </a:prstGeom>
+          <a:solidFill>
+            <a:schemeClr val="bg1"/>
+          </a:solidFill>
+        </p:spPr>
+        <p:style>
+          <a:lnRef idx="2">
+            <a:schemeClr val="accent1">
+              <a:shade val="15000"/>
+            </a:schemeClr>
+          </a:lnRef>
+          <a:fillRef idx="1">
+            <a:schemeClr val="accent1"/>
+          </a:fillRef>
+          <a:effectRef idx="0">
+            <a:schemeClr val="accent1"/>
+          </a:effectRef>
+          <a:fontRef idx="minor">
+            <a:schemeClr val="lt1"/>
+          </a:fontRef>
+        </p:style>
+        <p:txBody>
+          <a:bodyPr rtlCol="0" anchor="ctr"/>
+          <a:lstStyle/>
+          <a:p>
+            <a:pPr algn="ctr"/>
+            <a:r>
+              <a:rPr lang="en-US" dirty="0"/>
+              <a:t>PC</a:t>
+            </a:r>
+          </a:p>
+        </p:txBody>
+      </p:sp>
+      <p:cxnSp>
+        <p:nvCxnSpPr>
+          <p:cNvPr id="120" name="Straight Arrow Connector 119">
+            <a:extLst>
+              <a:ext uri="{FF2B5EF4-FFF2-40B4-BE49-F238E27FC236}">
+                <a16:creationId xmlns:a16="http://schemas.microsoft.com/office/drawing/2014/main" id="{8F9F2904-9166-F5F4-60EE-5C800E0BF5AB}"/>
+              </a:ext>
+            </a:extLst>
+          </p:cNvPr>
+          <p:cNvCxnSpPr>
+            <a:cxnSpLocks/>
+          </p:cNvCxnSpPr>
+          <p:nvPr/>
+        </p:nvCxnSpPr>
+        <p:spPr>
+          <a:xfrm>
+            <a:off x="3306671" y="4753370"/>
+            <a:ext cx="839348" cy="510215"/>
+          </a:xfrm>
+          <a:prstGeom prst="bentConnector3">
+            <a:avLst>
+              <a:gd name="adj1" fmla="val -2335"/>
+            </a:avLst>
+          </a:prstGeom>
+          <a:ln>
+            <a:solidFill>
+              <a:srgbClr val="FF0000"/>
+            </a:solidFill>
+            <a:tailEnd type="triangle"/>
+          </a:ln>
+        </p:spPr>
+        <p:style>
+          <a:lnRef idx="2">
+            <a:schemeClr val="accent1"/>
+          </a:lnRef>
+          <a:fillRef idx="0">
+            <a:schemeClr val="accent1"/>
+          </a:fillRef>
+          <a:effectRef idx="1">
+            <a:schemeClr val="accent1"/>
+          </a:effectRef>
+          <a:fontRef idx="minor">
+            <a:schemeClr val="tx1"/>
+          </a:fontRef>
+        </p:style>
+      </p:cxnSp>
+      <p:sp>
+        <p:nvSpPr>
+          <p:cNvPr id="132" name="TextBox 131">
+            <a:extLst>
+              <a:ext uri="{FF2B5EF4-FFF2-40B4-BE49-F238E27FC236}">
+                <a16:creationId xmlns:a16="http://schemas.microsoft.com/office/drawing/2014/main" id="{647A475E-9858-159D-562A-3C9830E9809F}"/>
+              </a:ext>
+            </a:extLst>
+          </p:cNvPr>
+          <p:cNvSpPr txBox="1"/>
+          <p:nvPr/>
+        </p:nvSpPr>
+        <p:spPr>
+          <a:xfrm>
+            <a:off x="4247724" y="4511912"/>
+            <a:ext cx="699230" cy="400110"/>
+          </a:xfrm>
+          <a:prstGeom prst="rect">
+            <a:avLst/>
+          </a:prstGeom>
+          <a:noFill/>
+        </p:spPr>
+        <p:txBody>
+          <a:bodyPr wrap="none" rtlCol="0">
+            <a:spAutoFit/>
+          </a:bodyPr>
+          <a:lstStyle/>
+          <a:p>
+            <a:pPr algn="ctr"/>
+            <a:r>
+              <a:rPr lang="en-US" sz="1000" dirty="0"/>
+              <a:t>Pipeline</a:t>
+            </a:r>
+          </a:p>
+          <a:p>
+            <a:pPr algn="ctr"/>
+            <a:r>
+              <a:rPr lang="en-US" sz="1000" dirty="0"/>
+              <a:t>Registers</a:t>
+            </a:r>
+          </a:p>
+        </p:txBody>
+      </p:sp>
+      <p:cxnSp>
+        <p:nvCxnSpPr>
+          <p:cNvPr id="133" name="Straight Arrow Connector 132">
+            <a:extLst>
+              <a:ext uri="{FF2B5EF4-FFF2-40B4-BE49-F238E27FC236}">
+                <a16:creationId xmlns:a16="http://schemas.microsoft.com/office/drawing/2014/main" id="{87EED451-9922-5715-3FB3-032CE161B995}"/>
+              </a:ext>
+            </a:extLst>
+          </p:cNvPr>
+          <p:cNvCxnSpPr>
+            <a:cxnSpLocks/>
+          </p:cNvCxnSpPr>
+          <p:nvPr/>
+        </p:nvCxnSpPr>
+        <p:spPr>
+          <a:xfrm>
+            <a:off x="5033599" y="5464800"/>
+            <a:ext cx="5718221" cy="0"/>
+          </a:xfrm>
+          <a:prstGeom prst="straightConnector1">
+            <a:avLst/>
+          </a:prstGeom>
+          <a:ln>
+            <a:solidFill>
+              <a:srgbClr val="FF0000"/>
+            </a:solidFill>
+            <a:tailEnd type="triangle"/>
+          </a:ln>
+        </p:spPr>
+        <p:style>
+          <a:lnRef idx="2">
+            <a:schemeClr val="accent1"/>
+          </a:lnRef>
+          <a:fillRef idx="0">
+            <a:schemeClr val="accent1"/>
+          </a:fillRef>
+          <a:effectRef idx="1">
+            <a:schemeClr val="accent1"/>
+          </a:effectRef>
+          <a:fontRef idx="minor">
+            <a:schemeClr val="tx1"/>
+          </a:fontRef>
+        </p:style>
+      </p:cxnSp>
+      <p:sp>
+        <p:nvSpPr>
+          <p:cNvPr id="135" name="TextBox 134">
+            <a:extLst>
+              <a:ext uri="{FF2B5EF4-FFF2-40B4-BE49-F238E27FC236}">
+                <a16:creationId xmlns:a16="http://schemas.microsoft.com/office/drawing/2014/main" id="{2270A7FF-D6A4-4C58-7945-171BF8041A55}"/>
+              </a:ext>
+            </a:extLst>
+          </p:cNvPr>
+          <p:cNvSpPr txBox="1"/>
+          <p:nvPr/>
+        </p:nvSpPr>
+        <p:spPr>
+          <a:xfrm>
+            <a:off x="5530564" y="3429000"/>
+            <a:ext cx="548548" cy="230832"/>
+          </a:xfrm>
+          <a:prstGeom prst="rect">
+            <a:avLst/>
+          </a:prstGeom>
+          <a:noFill/>
+        </p:spPr>
+        <p:txBody>
+          <a:bodyPr wrap="none" rtlCol="0">
+            <a:spAutoFit/>
+          </a:bodyPr>
+          <a:lstStyle/>
+          <a:p>
+            <a:pPr algn="ctr"/>
+            <a:r>
+              <a:rPr lang="en-US" sz="900" dirty="0" err="1"/>
+              <a:t>alu_src</a:t>
+            </a:r>
+            <a:endParaRPr lang="en-US" sz="900" dirty="0"/>
+          </a:p>
+        </p:txBody>
+      </p:sp>
+      <p:sp>
+        <p:nvSpPr>
+          <p:cNvPr id="137" name="TextBox 136">
+            <a:extLst>
+              <a:ext uri="{FF2B5EF4-FFF2-40B4-BE49-F238E27FC236}">
+                <a16:creationId xmlns:a16="http://schemas.microsoft.com/office/drawing/2014/main" id="{06909561-FD73-EF14-3771-15E2525E3551}"/>
+              </a:ext>
+            </a:extLst>
+          </p:cNvPr>
+          <p:cNvSpPr txBox="1"/>
+          <p:nvPr/>
+        </p:nvSpPr>
+        <p:spPr>
+          <a:xfrm>
+            <a:off x="6055360" y="3400264"/>
+            <a:ext cx="521297" cy="230832"/>
+          </a:xfrm>
+          <a:prstGeom prst="rect">
+            <a:avLst/>
+          </a:prstGeom>
+          <a:noFill/>
+        </p:spPr>
+        <p:txBody>
+          <a:bodyPr wrap="none" rtlCol="0">
+            <a:spAutoFit/>
+          </a:bodyPr>
+          <a:lstStyle/>
+          <a:p>
+            <a:pPr algn="ctr"/>
+            <a:r>
+              <a:rPr lang="en-US" sz="900" dirty="0" err="1"/>
+              <a:t>alu_op</a:t>
+            </a:r>
+            <a:endParaRPr lang="en-US" sz="900" dirty="0"/>
+          </a:p>
+        </p:txBody>
+      </p:sp>
+      <p:sp>
+        <p:nvSpPr>
+          <p:cNvPr id="138" name="TextBox 137">
+            <a:extLst>
+              <a:ext uri="{FF2B5EF4-FFF2-40B4-BE49-F238E27FC236}">
+                <a16:creationId xmlns:a16="http://schemas.microsoft.com/office/drawing/2014/main" id="{53B4DF9E-7170-81B7-70D2-D3EECDE0C099}"/>
+              </a:ext>
+            </a:extLst>
+          </p:cNvPr>
+          <p:cNvSpPr txBox="1"/>
+          <p:nvPr/>
+        </p:nvSpPr>
+        <p:spPr>
+          <a:xfrm>
+            <a:off x="2948822" y="3622999"/>
+            <a:ext cx="1003832" cy="230832"/>
+          </a:xfrm>
+          <a:prstGeom prst="rect">
+            <a:avLst/>
+          </a:prstGeom>
+          <a:noFill/>
+        </p:spPr>
+        <p:txBody>
+          <a:bodyPr wrap="square" rtlCol="0">
+            <a:spAutoFit/>
+          </a:bodyPr>
+          <a:lstStyle/>
+          <a:p>
+            <a:pPr algn="ctr"/>
+            <a:r>
+              <a:rPr lang="en-US" sz="900" dirty="0" err="1"/>
+              <a:t>reg_write_chip</a:t>
+            </a:r>
+            <a:endParaRPr lang="en-US" sz="900" dirty="0"/>
+          </a:p>
+        </p:txBody>
+      </p:sp>
+      <p:sp>
+        <p:nvSpPr>
+          <p:cNvPr id="140" name="TextBox 139">
+            <a:extLst>
+              <a:ext uri="{FF2B5EF4-FFF2-40B4-BE49-F238E27FC236}">
+                <a16:creationId xmlns:a16="http://schemas.microsoft.com/office/drawing/2014/main" id="{0033FE34-B5CE-38E2-D4DB-B1C189C2EEFB}"/>
+              </a:ext>
+            </a:extLst>
+          </p:cNvPr>
+          <p:cNvSpPr txBox="1"/>
+          <p:nvPr/>
+        </p:nvSpPr>
+        <p:spPr>
+          <a:xfrm>
+            <a:off x="11073075" y="2725346"/>
+            <a:ext cx="607859" cy="230832"/>
+          </a:xfrm>
+          <a:prstGeom prst="rect">
+            <a:avLst/>
+          </a:prstGeom>
+          <a:noFill/>
+        </p:spPr>
+        <p:txBody>
+          <a:bodyPr wrap="none" rtlCol="0">
+            <a:spAutoFit/>
+          </a:bodyPr>
+          <a:lstStyle/>
+          <a:p>
+            <a:pPr algn="ctr"/>
+            <a:r>
+              <a:rPr lang="en-US" sz="900" dirty="0" err="1"/>
+              <a:t>wb_data</a:t>
+            </a:r>
+            <a:endParaRPr lang="en-US" sz="900" dirty="0"/>
+          </a:p>
+        </p:txBody>
+      </p:sp>
+      <p:sp>
+        <p:nvSpPr>
+          <p:cNvPr id="141" name="TextBox 140">
+            <a:extLst>
+              <a:ext uri="{FF2B5EF4-FFF2-40B4-BE49-F238E27FC236}">
+                <a16:creationId xmlns:a16="http://schemas.microsoft.com/office/drawing/2014/main" id="{52D58100-4462-7A0C-44AB-888F483AB65E}"/>
+              </a:ext>
+            </a:extLst>
+          </p:cNvPr>
+          <p:cNvSpPr txBox="1"/>
+          <p:nvPr/>
+        </p:nvSpPr>
+        <p:spPr>
+          <a:xfrm>
+            <a:off x="9485687" y="2554926"/>
+            <a:ext cx="1226619" cy="230832"/>
+          </a:xfrm>
+          <a:prstGeom prst="rect">
+            <a:avLst/>
+          </a:prstGeom>
+          <a:noFill/>
+        </p:spPr>
+        <p:txBody>
+          <a:bodyPr wrap="none" rtlCol="0">
+            <a:spAutoFit/>
+          </a:bodyPr>
+          <a:lstStyle/>
+          <a:p>
+            <a:pPr algn="r"/>
+            <a:r>
+              <a:rPr lang="en-US" sz="900" dirty="0" err="1"/>
+              <a:t>mem_wb_mem_data</a:t>
+            </a:r>
+            <a:endParaRPr lang="en-US" sz="900" dirty="0"/>
+          </a:p>
+        </p:txBody>
+      </p:sp>
+      <p:sp>
+        <p:nvSpPr>
+          <p:cNvPr id="142" name="TextBox 141">
+            <a:extLst>
+              <a:ext uri="{FF2B5EF4-FFF2-40B4-BE49-F238E27FC236}">
+                <a16:creationId xmlns:a16="http://schemas.microsoft.com/office/drawing/2014/main" id="{871B4814-CA36-FFB0-4445-118A018674B1}"/>
+              </a:ext>
+            </a:extLst>
+          </p:cNvPr>
+          <p:cNvSpPr txBox="1"/>
+          <p:nvPr/>
+        </p:nvSpPr>
+        <p:spPr>
+          <a:xfrm>
+            <a:off x="9443353" y="2786781"/>
+            <a:ext cx="1189749" cy="230832"/>
+          </a:xfrm>
+          <a:prstGeom prst="rect">
+            <a:avLst/>
+          </a:prstGeom>
+          <a:noFill/>
+        </p:spPr>
+        <p:txBody>
+          <a:bodyPr wrap="none" rtlCol="0">
+            <a:spAutoFit/>
+          </a:bodyPr>
+          <a:lstStyle/>
+          <a:p>
+            <a:pPr algn="r"/>
+            <a:r>
+              <a:rPr lang="en-US" sz="900" dirty="0" err="1"/>
+              <a:t>mem_wb_alu_result</a:t>
+            </a:r>
+            <a:endParaRPr lang="en-US" sz="900" dirty="0"/>
+          </a:p>
+        </p:txBody>
+      </p:sp>
+      <p:sp>
+        <p:nvSpPr>
+          <p:cNvPr id="143" name="TextBox 142">
+            <a:extLst>
+              <a:ext uri="{FF2B5EF4-FFF2-40B4-BE49-F238E27FC236}">
+                <a16:creationId xmlns:a16="http://schemas.microsoft.com/office/drawing/2014/main" id="{83767775-1F10-D09F-FFBF-A0C89EA41BB9}"/>
+              </a:ext>
+            </a:extLst>
+          </p:cNvPr>
+          <p:cNvSpPr txBox="1"/>
+          <p:nvPr/>
+        </p:nvSpPr>
+        <p:spPr>
+          <a:xfrm>
+            <a:off x="8680597" y="5158841"/>
+            <a:ext cx="1015086" cy="369332"/>
+          </a:xfrm>
+          <a:prstGeom prst="rect">
+            <a:avLst/>
+          </a:prstGeom>
+          <a:noFill/>
+        </p:spPr>
+        <p:txBody>
+          <a:bodyPr wrap="none" rtlCol="0">
+            <a:spAutoFit/>
+          </a:bodyPr>
+          <a:lstStyle/>
+          <a:p>
+            <a:pPr algn="r"/>
+            <a:r>
+              <a:rPr lang="en-US" sz="900" dirty="0" err="1"/>
+              <a:t>Ex_mem_branch</a:t>
+            </a:r>
+            <a:endParaRPr lang="en-US" sz="900" dirty="0"/>
+          </a:p>
+          <a:p>
+            <a:pPr algn="r"/>
+            <a:r>
+              <a:rPr lang="en-US" sz="900" dirty="0" err="1"/>
+              <a:t>Ex_mem_jump</a:t>
+            </a:r>
+            <a:endParaRPr lang="en-US" sz="900" dirty="0"/>
+          </a:p>
+        </p:txBody>
+      </p:sp>
+      <p:sp>
+        <p:nvSpPr>
+          <p:cNvPr id="144" name="TextBox 143">
+            <a:extLst>
+              <a:ext uri="{FF2B5EF4-FFF2-40B4-BE49-F238E27FC236}">
+                <a16:creationId xmlns:a16="http://schemas.microsoft.com/office/drawing/2014/main" id="{74E5BD52-D8C1-AD35-A782-A3CB0B4A28A8}"/>
+              </a:ext>
+            </a:extLst>
+          </p:cNvPr>
+          <p:cNvSpPr txBox="1"/>
+          <p:nvPr/>
+        </p:nvSpPr>
+        <p:spPr>
+          <a:xfrm>
+            <a:off x="7808124" y="2540481"/>
+            <a:ext cx="1218603" cy="369332"/>
+          </a:xfrm>
+          <a:prstGeom prst="rect">
+            <a:avLst/>
+          </a:prstGeom>
+          <a:noFill/>
+        </p:spPr>
+        <p:txBody>
+          <a:bodyPr wrap="none" rtlCol="0">
+            <a:spAutoFit/>
+          </a:bodyPr>
+          <a:lstStyle/>
+          <a:p>
+            <a:pPr algn="r"/>
+            <a:r>
+              <a:rPr lang="en-US" sz="900" dirty="0" err="1"/>
+              <a:t>Ex_mem_mem_read</a:t>
+            </a:r>
+            <a:endParaRPr lang="en-US" sz="900" dirty="0"/>
+          </a:p>
+          <a:p>
+            <a:pPr algn="r"/>
+            <a:r>
+              <a:rPr lang="en-US" sz="900" dirty="0" err="1"/>
+              <a:t>Ex_mem_mem_write</a:t>
+            </a:r>
+            <a:endParaRPr lang="en-US" sz="900" dirty="0"/>
+          </a:p>
+        </p:txBody>
+      </p:sp>
+      <p:sp>
+        <p:nvSpPr>
+          <p:cNvPr id="145" name="TextBox 144">
+            <a:extLst>
+              <a:ext uri="{FF2B5EF4-FFF2-40B4-BE49-F238E27FC236}">
+                <a16:creationId xmlns:a16="http://schemas.microsoft.com/office/drawing/2014/main" id="{CA104CBC-FA70-C9B7-158F-B660C9DCD176}"/>
+              </a:ext>
+            </a:extLst>
+          </p:cNvPr>
+          <p:cNvSpPr txBox="1"/>
+          <p:nvPr/>
+        </p:nvSpPr>
+        <p:spPr>
+          <a:xfrm>
+            <a:off x="4635120" y="5744237"/>
+            <a:ext cx="575799" cy="230832"/>
+          </a:xfrm>
+          <a:prstGeom prst="rect">
+            <a:avLst/>
+          </a:prstGeom>
+          <a:noFill/>
+        </p:spPr>
+        <p:txBody>
+          <a:bodyPr wrap="none" rtlCol="0">
+            <a:spAutoFit/>
+          </a:bodyPr>
+          <a:lstStyle/>
+          <a:p>
+            <a:pPr algn="ctr"/>
+            <a:r>
+              <a:rPr lang="en-US" sz="900" dirty="0" err="1"/>
+              <a:t>next_pc</a:t>
+            </a:r>
+            <a:endParaRPr lang="en-US" sz="900" dirty="0"/>
+          </a:p>
+        </p:txBody>
+      </p:sp>
+      <p:sp>
+        <p:nvSpPr>
+          <p:cNvPr id="149" name="TextBox 148">
+            <a:extLst>
+              <a:ext uri="{FF2B5EF4-FFF2-40B4-BE49-F238E27FC236}">
+                <a16:creationId xmlns:a16="http://schemas.microsoft.com/office/drawing/2014/main" id="{81095DB9-5E3C-BBF0-593A-786C6C51C151}"/>
+              </a:ext>
+            </a:extLst>
+          </p:cNvPr>
+          <p:cNvSpPr txBox="1"/>
+          <p:nvPr/>
+        </p:nvSpPr>
+        <p:spPr>
+          <a:xfrm>
+            <a:off x="10150564" y="3883242"/>
+            <a:ext cx="1323237" cy="507831"/>
+          </a:xfrm>
+          <a:prstGeom prst="rect">
+            <a:avLst/>
+          </a:prstGeom>
+          <a:noFill/>
+        </p:spPr>
+        <p:txBody>
+          <a:bodyPr wrap="square" rtlCol="0">
+            <a:spAutoFit/>
+          </a:bodyPr>
+          <a:lstStyle/>
+          <a:p>
+            <a:pPr algn="ctr"/>
+            <a:r>
+              <a:rPr lang="en-US" sz="900" dirty="0" err="1"/>
+              <a:t>Mem_wb_mem_read</a:t>
+            </a:r>
+            <a:endParaRPr lang="en-US" sz="900" dirty="0"/>
+          </a:p>
+          <a:p>
+            <a:pPr algn="ctr"/>
+            <a:r>
+              <a:rPr lang="en-US" sz="900" dirty="0" err="1"/>
+              <a:t>Mem_wb_load_addr</a:t>
+            </a:r>
+            <a:endParaRPr lang="en-US" sz="900" dirty="0"/>
+          </a:p>
+          <a:p>
+            <a:pPr algn="ctr"/>
+            <a:r>
+              <a:rPr lang="en-US" sz="900" dirty="0" err="1"/>
+              <a:t>Mem_wb_reg_write</a:t>
+            </a:r>
+            <a:endParaRPr lang="en-US" sz="900" dirty="0"/>
+          </a:p>
+        </p:txBody>
+      </p:sp>
+      <p:cxnSp>
+        <p:nvCxnSpPr>
+          <p:cNvPr id="150" name="Straight Arrow Connector 149">
+            <a:extLst>
+              <a:ext uri="{FF2B5EF4-FFF2-40B4-BE49-F238E27FC236}">
+                <a16:creationId xmlns:a16="http://schemas.microsoft.com/office/drawing/2014/main" id="{75AF78CE-F2C1-096A-9250-D4FFD82F5A52}"/>
+              </a:ext>
+            </a:extLst>
+          </p:cNvPr>
+          <p:cNvCxnSpPr>
+            <a:cxnSpLocks/>
+          </p:cNvCxnSpPr>
+          <p:nvPr/>
+        </p:nvCxnSpPr>
+        <p:spPr>
+          <a:xfrm flipV="1">
+            <a:off x="2286000" y="2540481"/>
+            <a:ext cx="1108177" cy="79"/>
+          </a:xfrm>
+          <a:prstGeom prst="straightConnector1">
+            <a:avLst/>
+          </a:prstGeom>
+          <a:ln>
+            <a:tailEnd type="triangle"/>
+          </a:ln>
+        </p:spPr>
+        <p:style>
+          <a:lnRef idx="2">
+            <a:schemeClr val="accent1"/>
+          </a:lnRef>
+          <a:fillRef idx="0">
+            <a:schemeClr val="accent1"/>
+          </a:fillRef>
+          <a:effectRef idx="1">
+            <a:schemeClr val="accent1"/>
+          </a:effectRef>
+          <a:fontRef idx="minor">
+            <a:schemeClr val="tx1"/>
+          </a:fontRef>
+        </p:style>
+      </p:cxnSp>
+      <p:cxnSp>
+        <p:nvCxnSpPr>
+          <p:cNvPr id="151" name="Straight Arrow Connector 150">
+            <a:extLst>
+              <a:ext uri="{FF2B5EF4-FFF2-40B4-BE49-F238E27FC236}">
+                <a16:creationId xmlns:a16="http://schemas.microsoft.com/office/drawing/2014/main" id="{86907908-A11A-272B-BFA4-928321305874}"/>
+              </a:ext>
+            </a:extLst>
+          </p:cNvPr>
+          <p:cNvCxnSpPr>
+            <a:cxnSpLocks/>
+          </p:cNvCxnSpPr>
+          <p:nvPr/>
+        </p:nvCxnSpPr>
+        <p:spPr>
+          <a:xfrm>
+            <a:off x="2286000" y="2753545"/>
+            <a:ext cx="1101639" cy="0"/>
+          </a:xfrm>
+          <a:prstGeom prst="straightConnector1">
+            <a:avLst/>
+          </a:prstGeom>
+          <a:ln>
+            <a:tailEnd type="triangle"/>
+          </a:ln>
+        </p:spPr>
+        <p:style>
+          <a:lnRef idx="2">
+            <a:schemeClr val="accent1"/>
+          </a:lnRef>
+          <a:fillRef idx="0">
+            <a:schemeClr val="accent1"/>
+          </a:fillRef>
+          <a:effectRef idx="1">
+            <a:schemeClr val="accent1"/>
+          </a:effectRef>
+          <a:fontRef idx="minor">
+            <a:schemeClr val="tx1"/>
+          </a:fontRef>
+        </p:style>
+      </p:cxnSp>
+      <p:cxnSp>
+        <p:nvCxnSpPr>
+          <p:cNvPr id="152" name="Straight Arrow Connector 151">
+            <a:extLst>
+              <a:ext uri="{FF2B5EF4-FFF2-40B4-BE49-F238E27FC236}">
+                <a16:creationId xmlns:a16="http://schemas.microsoft.com/office/drawing/2014/main" id="{187CAA4A-FD96-05F1-9CD6-FC2CB6854773}"/>
+              </a:ext>
+            </a:extLst>
+          </p:cNvPr>
+          <p:cNvCxnSpPr>
+            <a:cxnSpLocks/>
+          </p:cNvCxnSpPr>
+          <p:nvPr/>
+        </p:nvCxnSpPr>
+        <p:spPr>
+          <a:xfrm>
+            <a:off x="2286000" y="2971893"/>
+            <a:ext cx="1102156" cy="2586"/>
+          </a:xfrm>
+          <a:prstGeom prst="straightConnector1">
+            <a:avLst/>
+          </a:prstGeom>
+          <a:ln>
+            <a:tailEnd type="triangle"/>
+          </a:ln>
+        </p:spPr>
+        <p:style>
+          <a:lnRef idx="2">
+            <a:schemeClr val="accent1"/>
+          </a:lnRef>
+          <a:fillRef idx="0">
+            <a:schemeClr val="accent1"/>
+          </a:fillRef>
+          <a:effectRef idx="1">
+            <a:schemeClr val="accent1"/>
+          </a:effectRef>
+          <a:fontRef idx="minor">
+            <a:schemeClr val="tx1"/>
+          </a:fontRef>
+        </p:style>
+      </p:cxnSp>
+      <p:cxnSp>
+        <p:nvCxnSpPr>
+          <p:cNvPr id="153" name="Straight Arrow Connector 152">
+            <a:extLst>
+              <a:ext uri="{FF2B5EF4-FFF2-40B4-BE49-F238E27FC236}">
+                <a16:creationId xmlns:a16="http://schemas.microsoft.com/office/drawing/2014/main" id="{6E1E097F-7549-135E-2A8E-EB501ADE588F}"/>
+              </a:ext>
+            </a:extLst>
+          </p:cNvPr>
+          <p:cNvCxnSpPr>
+            <a:cxnSpLocks/>
+          </p:cNvCxnSpPr>
+          <p:nvPr/>
+        </p:nvCxnSpPr>
+        <p:spPr>
+          <a:xfrm>
+            <a:off x="3072930" y="3193986"/>
+            <a:ext cx="314709" cy="1072"/>
+          </a:xfrm>
+          <a:prstGeom prst="straightConnector1">
+            <a:avLst/>
+          </a:prstGeom>
+          <a:ln>
+            <a:tailEnd type="triangle"/>
+          </a:ln>
+        </p:spPr>
+        <p:style>
+          <a:lnRef idx="2">
+            <a:schemeClr val="accent1"/>
+          </a:lnRef>
+          <a:fillRef idx="0">
+            <a:schemeClr val="accent1"/>
+          </a:fillRef>
+          <a:effectRef idx="1">
+            <a:schemeClr val="accent1"/>
+          </a:effectRef>
+          <a:fontRef idx="minor">
+            <a:schemeClr val="tx1"/>
+          </a:fontRef>
+        </p:style>
+      </p:cxnSp>
+      <p:cxnSp>
+        <p:nvCxnSpPr>
+          <p:cNvPr id="154" name="Straight Connector 153">
+            <a:extLst>
+              <a:ext uri="{FF2B5EF4-FFF2-40B4-BE49-F238E27FC236}">
+                <a16:creationId xmlns:a16="http://schemas.microsoft.com/office/drawing/2014/main" id="{B847D3BD-1478-78AC-60D3-7393701929FA}"/>
+              </a:ext>
+            </a:extLst>
+          </p:cNvPr>
+          <p:cNvCxnSpPr/>
+          <p:nvPr/>
+        </p:nvCxnSpPr>
+        <p:spPr>
+          <a:xfrm flipH="1">
+            <a:off x="2286000" y="3251607"/>
+            <a:ext cx="353349" cy="0"/>
+          </a:xfrm>
+          <a:prstGeom prst="line">
+            <a:avLst/>
+          </a:prstGeom>
+        </p:spPr>
+        <p:style>
+          <a:lnRef idx="2">
+            <a:schemeClr val="accent1"/>
+          </a:lnRef>
+          <a:fillRef idx="0">
+            <a:schemeClr val="accent1"/>
+          </a:fillRef>
+          <a:effectRef idx="1">
+            <a:schemeClr val="accent1"/>
+          </a:effectRef>
+          <a:fontRef idx="minor">
+            <a:schemeClr val="tx1"/>
+          </a:fontRef>
+        </p:style>
+      </p:cxnSp>
+      <p:sp>
+        <p:nvSpPr>
+          <p:cNvPr id="155" name="TextBox 154">
+            <a:extLst>
+              <a:ext uri="{FF2B5EF4-FFF2-40B4-BE49-F238E27FC236}">
+                <a16:creationId xmlns:a16="http://schemas.microsoft.com/office/drawing/2014/main" id="{4E35A504-75F8-4CCC-6A6F-DC4C08289F9C}"/>
+              </a:ext>
+            </a:extLst>
+          </p:cNvPr>
+          <p:cNvSpPr txBox="1"/>
+          <p:nvPr/>
+        </p:nvSpPr>
+        <p:spPr>
+          <a:xfrm>
+            <a:off x="2514763" y="3018022"/>
+            <a:ext cx="607859" cy="230832"/>
+          </a:xfrm>
+          <a:prstGeom prst="rect">
+            <a:avLst/>
+          </a:prstGeom>
+          <a:noFill/>
+        </p:spPr>
+        <p:txBody>
+          <a:bodyPr wrap="none" rtlCol="0">
+            <a:spAutoFit/>
+          </a:bodyPr>
+          <a:lstStyle/>
+          <a:p>
+            <a:pPr algn="ctr"/>
+            <a:r>
+              <a:rPr lang="en-US" sz="900" dirty="0" err="1"/>
+              <a:t>wb_data</a:t>
+            </a:r>
+            <a:endParaRPr lang="en-US" sz="900" dirty="0"/>
+          </a:p>
+        </p:txBody>
+      </p:sp>
+      <p:sp>
+        <p:nvSpPr>
+          <p:cNvPr id="156" name="TextBox 155">
+            <a:extLst>
+              <a:ext uri="{FF2B5EF4-FFF2-40B4-BE49-F238E27FC236}">
+                <a16:creationId xmlns:a16="http://schemas.microsoft.com/office/drawing/2014/main" id="{A372FF5A-9959-3FFF-E35D-2EB884CDA75A}"/>
+              </a:ext>
+            </a:extLst>
+          </p:cNvPr>
+          <p:cNvSpPr txBox="1"/>
+          <p:nvPr/>
+        </p:nvSpPr>
+        <p:spPr>
+          <a:xfrm>
+            <a:off x="2246897" y="2357587"/>
+            <a:ext cx="1130438" cy="200055"/>
+          </a:xfrm>
+          <a:prstGeom prst="rect">
+            <a:avLst/>
+          </a:prstGeom>
+          <a:noFill/>
+        </p:spPr>
+        <p:txBody>
+          <a:bodyPr wrap="none" rtlCol="0">
+            <a:spAutoFit/>
+          </a:bodyPr>
+          <a:lstStyle/>
+          <a:p>
+            <a:pPr algn="ctr"/>
+            <a:r>
+              <a:rPr lang="en-US" sz="700" dirty="0" err="1"/>
+              <a:t>if_id_instr</a:t>
+            </a:r>
+            <a:r>
+              <a:rPr lang="en-US" sz="700" dirty="0"/>
+              <a:t>(19 </a:t>
+            </a:r>
+            <a:r>
+              <a:rPr lang="en-US" sz="700" dirty="0" err="1"/>
+              <a:t>downto</a:t>
+            </a:r>
+            <a:r>
+              <a:rPr lang="en-US" sz="700" dirty="0"/>
+              <a:t> 15)</a:t>
+            </a:r>
+          </a:p>
+        </p:txBody>
+      </p:sp>
+      <p:sp>
+        <p:nvSpPr>
+          <p:cNvPr id="157" name="TextBox 156">
+            <a:extLst>
+              <a:ext uri="{FF2B5EF4-FFF2-40B4-BE49-F238E27FC236}">
+                <a16:creationId xmlns:a16="http://schemas.microsoft.com/office/drawing/2014/main" id="{0BB6021B-34A3-4F84-BBF2-F049FBBBA698}"/>
+              </a:ext>
+            </a:extLst>
+          </p:cNvPr>
+          <p:cNvSpPr txBox="1"/>
+          <p:nvPr/>
+        </p:nvSpPr>
+        <p:spPr>
+          <a:xfrm>
+            <a:off x="2256728" y="2587626"/>
+            <a:ext cx="1130438" cy="200055"/>
+          </a:xfrm>
+          <a:prstGeom prst="rect">
+            <a:avLst/>
+          </a:prstGeom>
+          <a:noFill/>
+        </p:spPr>
+        <p:txBody>
+          <a:bodyPr wrap="none" rtlCol="0">
+            <a:spAutoFit/>
+          </a:bodyPr>
+          <a:lstStyle/>
+          <a:p>
+            <a:pPr algn="ctr"/>
+            <a:r>
+              <a:rPr lang="en-US" sz="700" dirty="0" err="1"/>
+              <a:t>if_id_instr</a:t>
+            </a:r>
+            <a:r>
+              <a:rPr lang="en-US" sz="700" dirty="0"/>
+              <a:t>(24 </a:t>
+            </a:r>
+            <a:r>
+              <a:rPr lang="en-US" sz="700" dirty="0" err="1"/>
+              <a:t>downto</a:t>
+            </a:r>
+            <a:r>
+              <a:rPr lang="en-US" sz="700" dirty="0"/>
+              <a:t> 20)</a:t>
+            </a:r>
+          </a:p>
+        </p:txBody>
+      </p:sp>
+      <p:sp>
+        <p:nvSpPr>
+          <p:cNvPr id="159" name="TextBox 158">
+            <a:extLst>
+              <a:ext uri="{FF2B5EF4-FFF2-40B4-BE49-F238E27FC236}">
+                <a16:creationId xmlns:a16="http://schemas.microsoft.com/office/drawing/2014/main" id="{2700C405-DFF3-6E08-C8F0-B49ECF4124E6}"/>
+              </a:ext>
+            </a:extLst>
+          </p:cNvPr>
+          <p:cNvSpPr txBox="1"/>
+          <p:nvPr/>
+        </p:nvSpPr>
+        <p:spPr>
+          <a:xfrm>
+            <a:off x="2289518" y="2804940"/>
+            <a:ext cx="1082348" cy="200055"/>
+          </a:xfrm>
+          <a:prstGeom prst="rect">
+            <a:avLst/>
+          </a:prstGeom>
+          <a:noFill/>
+        </p:spPr>
+        <p:txBody>
+          <a:bodyPr wrap="none" rtlCol="0">
+            <a:spAutoFit/>
+          </a:bodyPr>
+          <a:lstStyle/>
+          <a:p>
+            <a:pPr algn="ctr"/>
+            <a:r>
+              <a:rPr lang="en-US" sz="700" dirty="0" err="1"/>
+              <a:t>if_id_instr</a:t>
+            </a:r>
+            <a:r>
+              <a:rPr lang="en-US" sz="700" dirty="0"/>
+              <a:t>(11 </a:t>
+            </a:r>
+            <a:r>
+              <a:rPr lang="en-US" sz="700" dirty="0" err="1"/>
+              <a:t>downto</a:t>
+            </a:r>
+            <a:r>
+              <a:rPr lang="en-US" sz="700" dirty="0"/>
+              <a:t> 7)</a:t>
+            </a:r>
+          </a:p>
+        </p:txBody>
+      </p:sp>
     </p:spTree>
     <p:extLst>
       <p:ext uri="{BB962C8B-B14F-4D97-AF65-F5344CB8AC3E}">
